--- a/작업추가내용.pptx
+++ b/작업추가내용.pptx
@@ -104,6 +104,11 @@
       </a:defRPr>
     </a:lvl9pPr>
   </p:defaultTextStyle>
+  <p:extLst>
+    <p:ext uri="{EFAFB233-063F-42B5-8137-9DF3F51BA10A}">
+      <p15:sldGuideLst xmlns:p15="http://schemas.microsoft.com/office/powerpoint/2012/main"/>
+    </p:ext>
+  </p:extLst>
 </p:presentation>
 </file>
 
@@ -254,7 +259,7 @@
           <a:p>
             <a:fld id="{9BE1C720-ACC4-4A8E-B33A-18A3D3E259C1}" type="datetimeFigureOut">
               <a:rPr lang="ko-KR" altLang="en-US" smtClean="0"/>
-              <a:t>2025-12-14</a:t>
+              <a:t>2025-12-15</a:t>
             </a:fld>
             <a:endParaRPr lang="ko-KR" altLang="en-US"/>
           </a:p>
@@ -452,7 +457,7 @@
           <a:p>
             <a:fld id="{9BE1C720-ACC4-4A8E-B33A-18A3D3E259C1}" type="datetimeFigureOut">
               <a:rPr lang="ko-KR" altLang="en-US" smtClean="0"/>
-              <a:t>2025-12-14</a:t>
+              <a:t>2025-12-15</a:t>
             </a:fld>
             <a:endParaRPr lang="ko-KR" altLang="en-US"/>
           </a:p>
@@ -660,7 +665,7 @@
           <a:p>
             <a:fld id="{9BE1C720-ACC4-4A8E-B33A-18A3D3E259C1}" type="datetimeFigureOut">
               <a:rPr lang="ko-KR" altLang="en-US" smtClean="0"/>
-              <a:t>2025-12-14</a:t>
+              <a:t>2025-12-15</a:t>
             </a:fld>
             <a:endParaRPr lang="ko-KR" altLang="en-US"/>
           </a:p>
@@ -858,7 +863,7 @@
           <a:p>
             <a:fld id="{9BE1C720-ACC4-4A8E-B33A-18A3D3E259C1}" type="datetimeFigureOut">
               <a:rPr lang="ko-KR" altLang="en-US" smtClean="0"/>
-              <a:t>2025-12-14</a:t>
+              <a:t>2025-12-15</a:t>
             </a:fld>
             <a:endParaRPr lang="ko-KR" altLang="en-US"/>
           </a:p>
@@ -1133,7 +1138,7 @@
           <a:p>
             <a:fld id="{9BE1C720-ACC4-4A8E-B33A-18A3D3E259C1}" type="datetimeFigureOut">
               <a:rPr lang="ko-KR" altLang="en-US" smtClean="0"/>
-              <a:t>2025-12-14</a:t>
+              <a:t>2025-12-15</a:t>
             </a:fld>
             <a:endParaRPr lang="ko-KR" altLang="en-US"/>
           </a:p>
@@ -1398,7 +1403,7 @@
           <a:p>
             <a:fld id="{9BE1C720-ACC4-4A8E-B33A-18A3D3E259C1}" type="datetimeFigureOut">
               <a:rPr lang="ko-KR" altLang="en-US" smtClean="0"/>
-              <a:t>2025-12-14</a:t>
+              <a:t>2025-12-15</a:t>
             </a:fld>
             <a:endParaRPr lang="ko-KR" altLang="en-US"/>
           </a:p>
@@ -1810,7 +1815,7 @@
           <a:p>
             <a:fld id="{9BE1C720-ACC4-4A8E-B33A-18A3D3E259C1}" type="datetimeFigureOut">
               <a:rPr lang="ko-KR" altLang="en-US" smtClean="0"/>
-              <a:t>2025-12-14</a:t>
+              <a:t>2025-12-15</a:t>
             </a:fld>
             <a:endParaRPr lang="ko-KR" altLang="en-US"/>
           </a:p>
@@ -1951,7 +1956,7 @@
           <a:p>
             <a:fld id="{9BE1C720-ACC4-4A8E-B33A-18A3D3E259C1}" type="datetimeFigureOut">
               <a:rPr lang="ko-KR" altLang="en-US" smtClean="0"/>
-              <a:t>2025-12-14</a:t>
+              <a:t>2025-12-15</a:t>
             </a:fld>
             <a:endParaRPr lang="ko-KR" altLang="en-US"/>
           </a:p>
@@ -2064,7 +2069,7 @@
           <a:p>
             <a:fld id="{9BE1C720-ACC4-4A8E-B33A-18A3D3E259C1}" type="datetimeFigureOut">
               <a:rPr lang="ko-KR" altLang="en-US" smtClean="0"/>
-              <a:t>2025-12-14</a:t>
+              <a:t>2025-12-15</a:t>
             </a:fld>
             <a:endParaRPr lang="ko-KR" altLang="en-US"/>
           </a:p>
@@ -2375,7 +2380,7 @@
           <a:p>
             <a:fld id="{9BE1C720-ACC4-4A8E-B33A-18A3D3E259C1}" type="datetimeFigureOut">
               <a:rPr lang="ko-KR" altLang="en-US" smtClean="0"/>
-              <a:t>2025-12-14</a:t>
+              <a:t>2025-12-15</a:t>
             </a:fld>
             <a:endParaRPr lang="ko-KR" altLang="en-US"/>
           </a:p>
@@ -2663,7 +2668,7 @@
           <a:p>
             <a:fld id="{9BE1C720-ACC4-4A8E-B33A-18A3D3E259C1}" type="datetimeFigureOut">
               <a:rPr lang="ko-KR" altLang="en-US" smtClean="0"/>
-              <a:t>2025-12-14</a:t>
+              <a:t>2025-12-15</a:t>
             </a:fld>
             <a:endParaRPr lang="ko-KR" altLang="en-US"/>
           </a:p>
@@ -2904,7 +2909,7 @@
           <a:p>
             <a:fld id="{9BE1C720-ACC4-4A8E-B33A-18A3D3E259C1}" type="datetimeFigureOut">
               <a:rPr lang="ko-KR" altLang="en-US" smtClean="0"/>
-              <a:t>2025-12-14</a:t>
+              <a:t>2025-12-15</a:t>
             </a:fld>
             <a:endParaRPr lang="ko-KR" altLang="en-US"/>
           </a:p>
@@ -3366,7 +3371,7 @@
         <p:spPr>
           <a:xfrm>
             <a:off x="3155576" y="977153"/>
-            <a:ext cx="9070112" cy="1754326"/>
+            <a:ext cx="9070112" cy="3970318"/>
           </a:xfrm>
           <a:prstGeom prst="rect">
             <a:avLst/>
@@ -3527,6 +3532,306 @@
                 </a:solidFill>
               </a:rPr>
               <a:t>)</a:t>
+            </a:r>
+          </a:p>
+          <a:p>
+            <a:endParaRPr lang="en-US" altLang="ko-KR" dirty="0">
+              <a:solidFill>
+                <a:schemeClr val="bg1"/>
+              </a:solidFill>
+            </a:endParaRPr>
+          </a:p>
+          <a:p>
+            <a:r>
+              <a:rPr lang="en-US" altLang="ko-KR" dirty="0">
+                <a:solidFill>
+                  <a:schemeClr val="bg1"/>
+                </a:solidFill>
+              </a:rPr>
+              <a:t>4. </a:t>
+            </a:r>
+            <a:r>
+              <a:rPr lang="ko-KR" altLang="en-US" dirty="0">
+                <a:solidFill>
+                  <a:schemeClr val="bg1"/>
+                </a:solidFill>
+              </a:rPr>
+              <a:t>추후 </a:t>
+            </a:r>
+            <a:r>
+              <a:rPr lang="en-US" altLang="ko-KR" dirty="0">
+                <a:solidFill>
+                  <a:schemeClr val="bg1"/>
+                </a:solidFill>
+              </a:rPr>
+              <a:t>PDO</a:t>
+            </a:r>
+            <a:r>
+              <a:rPr lang="ko-KR" altLang="en-US" dirty="0">
+                <a:solidFill>
+                  <a:schemeClr val="bg1"/>
+                </a:solidFill>
+              </a:rPr>
+              <a:t>를 그룹별로 묶어서 관리 필요</a:t>
+            </a:r>
+            <a:r>
+              <a:rPr lang="en-US" altLang="ko-KR" dirty="0">
+                <a:solidFill>
+                  <a:schemeClr val="bg1"/>
+                </a:solidFill>
+              </a:rPr>
+              <a:t>. </a:t>
+            </a:r>
+            <a:br>
+              <a:rPr lang="en-US" altLang="ko-KR" dirty="0">
+                <a:solidFill>
+                  <a:schemeClr val="bg1"/>
+                </a:solidFill>
+              </a:rPr>
+            </a:br>
+            <a:r>
+              <a:rPr lang="en-US" altLang="ko-KR" dirty="0">
+                <a:solidFill>
+                  <a:schemeClr val="bg1"/>
+                </a:solidFill>
+              </a:rPr>
+              <a:t>    IO</a:t>
+            </a:r>
+            <a:r>
+              <a:rPr lang="ko-KR" altLang="en-US" dirty="0">
+                <a:solidFill>
+                  <a:schemeClr val="bg1"/>
+                </a:solidFill>
+              </a:rPr>
+              <a:t>의 경우 </a:t>
+            </a:r>
+            <a:r>
+              <a:rPr lang="en-US" altLang="ko-KR" dirty="0">
+                <a:solidFill>
+                  <a:schemeClr val="bg1"/>
+                </a:solidFill>
+              </a:rPr>
+              <a:t>PDO</a:t>
+            </a:r>
+            <a:r>
+              <a:rPr lang="ko-KR" altLang="en-US" dirty="0">
+                <a:solidFill>
+                  <a:schemeClr val="bg1"/>
+                </a:solidFill>
+              </a:rPr>
+              <a:t>주기 </a:t>
+            </a:r>
+            <a:r>
+              <a:rPr lang="en-US" altLang="ko-KR" dirty="0">
+                <a:solidFill>
+                  <a:schemeClr val="bg1"/>
+                </a:solidFill>
+              </a:rPr>
+              <a:t>10ms, </a:t>
+            </a:r>
+            <a:r>
+              <a:rPr lang="ko-KR" altLang="en-US" dirty="0" err="1">
+                <a:solidFill>
+                  <a:schemeClr val="bg1"/>
+                </a:solidFill>
+              </a:rPr>
+              <a:t>서보의</a:t>
+            </a:r>
+            <a:r>
+              <a:rPr lang="ko-KR" altLang="en-US" dirty="0">
+                <a:solidFill>
+                  <a:schemeClr val="bg1"/>
+                </a:solidFill>
+              </a:rPr>
+              <a:t> 경우 </a:t>
+            </a:r>
+            <a:r>
+              <a:rPr lang="en-US" altLang="ko-KR" dirty="0">
+                <a:solidFill>
+                  <a:schemeClr val="bg1"/>
+                </a:solidFill>
+              </a:rPr>
+              <a:t>1ms.</a:t>
+            </a:r>
+          </a:p>
+          <a:p>
+            <a:endParaRPr lang="en-US" altLang="ko-KR" dirty="0">
+              <a:solidFill>
+                <a:schemeClr val="bg1"/>
+              </a:solidFill>
+            </a:endParaRPr>
+          </a:p>
+          <a:p>
+            <a:r>
+              <a:rPr lang="en-US" altLang="ko-KR" dirty="0">
+                <a:solidFill>
+                  <a:schemeClr val="bg1"/>
+                </a:solidFill>
+              </a:rPr>
+              <a:t>4-1. PDO</a:t>
+            </a:r>
+            <a:r>
+              <a:rPr lang="ko-KR" altLang="en-US" dirty="0" err="1">
+                <a:solidFill>
+                  <a:schemeClr val="bg1"/>
+                </a:solidFill>
+              </a:rPr>
+              <a:t>통신량</a:t>
+            </a:r>
+            <a:r>
+              <a:rPr lang="ko-KR" altLang="en-US" dirty="0">
+                <a:solidFill>
+                  <a:schemeClr val="bg1"/>
+                </a:solidFill>
+              </a:rPr>
+              <a:t> 모니터링</a:t>
+            </a:r>
+            <a:r>
+              <a:rPr lang="en-US" altLang="ko-KR" dirty="0">
+                <a:solidFill>
+                  <a:schemeClr val="bg1"/>
+                </a:solidFill>
+              </a:rPr>
+              <a:t>? </a:t>
+            </a:r>
+            <a:r>
+              <a:rPr lang="ko-KR" altLang="en-US" dirty="0">
+                <a:solidFill>
+                  <a:schemeClr val="bg1"/>
+                </a:solidFill>
+              </a:rPr>
+              <a:t>현재 몇 </a:t>
+            </a:r>
+            <a:r>
+              <a:rPr lang="en-US" altLang="ko-KR" dirty="0">
+                <a:solidFill>
+                  <a:schemeClr val="bg1"/>
+                </a:solidFill>
+              </a:rPr>
+              <a:t>byte</a:t>
+            </a:r>
+            <a:r>
+              <a:rPr lang="ko-KR" altLang="en-US" dirty="0">
+                <a:solidFill>
+                  <a:schemeClr val="bg1"/>
+                </a:solidFill>
+              </a:rPr>
+              <a:t>인지</a:t>
+            </a:r>
+            <a:r>
+              <a:rPr lang="en-US" altLang="ko-KR" dirty="0">
+                <a:solidFill>
+                  <a:schemeClr val="bg1"/>
+                </a:solidFill>
+              </a:rPr>
+              <a:t>.</a:t>
+            </a:r>
+          </a:p>
+          <a:p>
+            <a:endParaRPr lang="en-US" altLang="ko-KR" dirty="0">
+              <a:solidFill>
+                <a:schemeClr val="bg1"/>
+              </a:solidFill>
+            </a:endParaRPr>
+          </a:p>
+          <a:p>
+            <a:r>
+              <a:rPr lang="en-US" altLang="ko-KR" dirty="0">
+                <a:solidFill>
+                  <a:schemeClr val="bg1"/>
+                </a:solidFill>
+              </a:rPr>
+              <a:t>5. SDO</a:t>
+            </a:r>
+            <a:r>
+              <a:rPr lang="ko-KR" altLang="en-US" dirty="0">
+                <a:solidFill>
+                  <a:schemeClr val="bg1"/>
+                </a:solidFill>
+              </a:rPr>
+              <a:t>를 포함한</a:t>
+            </a:r>
+            <a:r>
+              <a:rPr lang="en-US" altLang="ko-KR" dirty="0">
+                <a:solidFill>
+                  <a:schemeClr val="bg1"/>
+                </a:solidFill>
+              </a:rPr>
+              <a:t>, Mailbox loop</a:t>
+            </a:r>
+            <a:r>
+              <a:rPr lang="ko-KR" altLang="en-US" dirty="0">
+                <a:solidFill>
+                  <a:schemeClr val="bg1"/>
+                </a:solidFill>
+              </a:rPr>
+              <a:t>도 필요</a:t>
+            </a:r>
+            <a:r>
+              <a:rPr lang="en-US" altLang="ko-KR" dirty="0">
+                <a:solidFill>
+                  <a:schemeClr val="bg1"/>
+                </a:solidFill>
+              </a:rPr>
+              <a:t>. </a:t>
+            </a:r>
+          </a:p>
+          <a:p>
+            <a:r>
+              <a:rPr lang="en-US" altLang="ko-KR" dirty="0">
+                <a:solidFill>
+                  <a:schemeClr val="bg1"/>
+                </a:solidFill>
+              </a:rPr>
+              <a:t>    </a:t>
+            </a:r>
+            <a:r>
+              <a:rPr lang="ko-KR" altLang="en-US" dirty="0">
+                <a:solidFill>
+                  <a:schemeClr val="bg1"/>
+                </a:solidFill>
+              </a:rPr>
+              <a:t>큐로 동작하며</a:t>
+            </a:r>
+            <a:r>
+              <a:rPr lang="en-US" altLang="ko-KR" dirty="0">
+                <a:solidFill>
+                  <a:schemeClr val="bg1"/>
+                </a:solidFill>
+              </a:rPr>
+              <a:t>, </a:t>
+            </a:r>
+            <a:r>
+              <a:rPr lang="en-US" altLang="ko-KR" dirty="0" err="1">
+                <a:solidFill>
+                  <a:schemeClr val="bg1"/>
+                </a:solidFill>
+              </a:rPr>
+              <a:t>ProcessData</a:t>
+            </a:r>
+            <a:r>
+              <a:rPr lang="en-US" altLang="ko-KR" dirty="0">
+                <a:solidFill>
+                  <a:schemeClr val="bg1"/>
+                </a:solidFill>
+              </a:rPr>
+              <a:t>(PDO)</a:t>
+            </a:r>
+            <a:r>
+              <a:rPr lang="ko-KR" altLang="en-US" dirty="0">
+                <a:solidFill>
+                  <a:schemeClr val="bg1"/>
+                </a:solidFill>
+              </a:rPr>
+              <a:t>랑 겹치면 안됨</a:t>
+            </a:r>
+            <a:r>
+              <a:rPr lang="en-US" altLang="ko-KR" dirty="0">
+                <a:solidFill>
+                  <a:schemeClr val="bg1"/>
+                </a:solidFill>
+              </a:rPr>
+              <a:t>.</a:t>
             </a:r>
           </a:p>
           <a:p>

--- a/작업추가내용.pptx
+++ b/작업추가내용.pptx
@@ -6,6 +6,7 @@
   </p:sldMasterIdLst>
   <p:sldIdLst>
     <p:sldId id="256" r:id="rId2"/>
+    <p:sldId id="257" r:id="rId3"/>
   </p:sldIdLst>
   <p:sldSz cx="12192000" cy="6858000"/>
   <p:notesSz cx="6858000" cy="9144000"/>
@@ -259,7 +260,7 @@
           <a:p>
             <a:fld id="{9BE1C720-ACC4-4A8E-B33A-18A3D3E259C1}" type="datetimeFigureOut">
               <a:rPr lang="ko-KR" altLang="en-US" smtClean="0"/>
-              <a:t>2025-12-15</a:t>
+              <a:t>2026-02-08</a:t>
             </a:fld>
             <a:endParaRPr lang="ko-KR" altLang="en-US"/>
           </a:p>
@@ -457,7 +458,7 @@
           <a:p>
             <a:fld id="{9BE1C720-ACC4-4A8E-B33A-18A3D3E259C1}" type="datetimeFigureOut">
               <a:rPr lang="ko-KR" altLang="en-US" smtClean="0"/>
-              <a:t>2025-12-15</a:t>
+              <a:t>2026-02-08</a:t>
             </a:fld>
             <a:endParaRPr lang="ko-KR" altLang="en-US"/>
           </a:p>
@@ -665,7 +666,7 @@
           <a:p>
             <a:fld id="{9BE1C720-ACC4-4A8E-B33A-18A3D3E259C1}" type="datetimeFigureOut">
               <a:rPr lang="ko-KR" altLang="en-US" smtClean="0"/>
-              <a:t>2025-12-15</a:t>
+              <a:t>2026-02-08</a:t>
             </a:fld>
             <a:endParaRPr lang="ko-KR" altLang="en-US"/>
           </a:p>
@@ -863,7 +864,7 @@
           <a:p>
             <a:fld id="{9BE1C720-ACC4-4A8E-B33A-18A3D3E259C1}" type="datetimeFigureOut">
               <a:rPr lang="ko-KR" altLang="en-US" smtClean="0"/>
-              <a:t>2025-12-15</a:t>
+              <a:t>2026-02-08</a:t>
             </a:fld>
             <a:endParaRPr lang="ko-KR" altLang="en-US"/>
           </a:p>
@@ -1138,7 +1139,7 @@
           <a:p>
             <a:fld id="{9BE1C720-ACC4-4A8E-B33A-18A3D3E259C1}" type="datetimeFigureOut">
               <a:rPr lang="ko-KR" altLang="en-US" smtClean="0"/>
-              <a:t>2025-12-15</a:t>
+              <a:t>2026-02-08</a:t>
             </a:fld>
             <a:endParaRPr lang="ko-KR" altLang="en-US"/>
           </a:p>
@@ -1403,7 +1404,7 @@
           <a:p>
             <a:fld id="{9BE1C720-ACC4-4A8E-B33A-18A3D3E259C1}" type="datetimeFigureOut">
               <a:rPr lang="ko-KR" altLang="en-US" smtClean="0"/>
-              <a:t>2025-12-15</a:t>
+              <a:t>2026-02-08</a:t>
             </a:fld>
             <a:endParaRPr lang="ko-KR" altLang="en-US"/>
           </a:p>
@@ -1815,7 +1816,7 @@
           <a:p>
             <a:fld id="{9BE1C720-ACC4-4A8E-B33A-18A3D3E259C1}" type="datetimeFigureOut">
               <a:rPr lang="ko-KR" altLang="en-US" smtClean="0"/>
-              <a:t>2025-12-15</a:t>
+              <a:t>2026-02-08</a:t>
             </a:fld>
             <a:endParaRPr lang="ko-KR" altLang="en-US"/>
           </a:p>
@@ -1956,7 +1957,7 @@
           <a:p>
             <a:fld id="{9BE1C720-ACC4-4A8E-B33A-18A3D3E259C1}" type="datetimeFigureOut">
               <a:rPr lang="ko-KR" altLang="en-US" smtClean="0"/>
-              <a:t>2025-12-15</a:t>
+              <a:t>2026-02-08</a:t>
             </a:fld>
             <a:endParaRPr lang="ko-KR" altLang="en-US"/>
           </a:p>
@@ -2069,7 +2070,7 @@
           <a:p>
             <a:fld id="{9BE1C720-ACC4-4A8E-B33A-18A3D3E259C1}" type="datetimeFigureOut">
               <a:rPr lang="ko-KR" altLang="en-US" smtClean="0"/>
-              <a:t>2025-12-15</a:t>
+              <a:t>2026-02-08</a:t>
             </a:fld>
             <a:endParaRPr lang="ko-KR" altLang="en-US"/>
           </a:p>
@@ -2380,7 +2381,7 @@
           <a:p>
             <a:fld id="{9BE1C720-ACC4-4A8E-B33A-18A3D3E259C1}" type="datetimeFigureOut">
               <a:rPr lang="ko-KR" altLang="en-US" smtClean="0"/>
-              <a:t>2025-12-15</a:t>
+              <a:t>2026-02-08</a:t>
             </a:fld>
             <a:endParaRPr lang="ko-KR" altLang="en-US"/>
           </a:p>
@@ -2668,7 +2669,7 @@
           <a:p>
             <a:fld id="{9BE1C720-ACC4-4A8E-B33A-18A3D3E259C1}" type="datetimeFigureOut">
               <a:rPr lang="ko-KR" altLang="en-US" smtClean="0"/>
-              <a:t>2025-12-15</a:t>
+              <a:t>2026-02-08</a:t>
             </a:fld>
             <a:endParaRPr lang="ko-KR" altLang="en-US"/>
           </a:p>
@@ -2909,7 +2910,7 @@
           <a:p>
             <a:fld id="{9BE1C720-ACC4-4A8E-B33A-18A3D3E259C1}" type="datetimeFigureOut">
               <a:rPr lang="ko-KR" altLang="en-US" smtClean="0"/>
-              <a:t>2025-12-15</a:t>
+              <a:t>2026-02-08</a:t>
             </a:fld>
             <a:endParaRPr lang="ko-KR" altLang="en-US"/>
           </a:p>
@@ -3856,6 +3857,672 @@
 </p:sld>
 </file>
 
+<file path=ppt/slides/slide2.xml><?xml version="1.0" encoding="utf-8"?>
+<p:sld xmlns:a="http://schemas.openxmlformats.org/drawingml/2006/main" xmlns:r="http://schemas.openxmlformats.org/officeDocument/2006/relationships" xmlns:p="http://schemas.openxmlformats.org/presentationml/2006/main">
+  <p:cSld>
+    <p:spTree>
+      <p:nvGrpSpPr>
+        <p:cNvPr id="1" name=""/>
+        <p:cNvGrpSpPr/>
+        <p:nvPr/>
+      </p:nvGrpSpPr>
+      <p:grpSpPr>
+        <a:xfrm>
+          <a:off x="0" y="0"/>
+          <a:ext cx="0" cy="0"/>
+          <a:chOff x="0" y="0"/>
+          <a:chExt cx="0" cy="0"/>
+        </a:xfrm>
+      </p:grpSpPr>
+      <p:sp>
+        <p:nvSpPr>
+          <p:cNvPr id="4" name="TextBox 3">
+            <a:extLst>
+              <a:ext uri="{FF2B5EF4-FFF2-40B4-BE49-F238E27FC236}">
+                <a16:creationId xmlns:a16="http://schemas.microsoft.com/office/drawing/2014/main" id="{52780608-97BC-E847-7D1B-B7D1608497C8}"/>
+              </a:ext>
+            </a:extLst>
+          </p:cNvPr>
+          <p:cNvSpPr txBox="1"/>
+          <p:nvPr/>
+        </p:nvSpPr>
+        <p:spPr>
+          <a:xfrm>
+            <a:off x="556591" y="198783"/>
+            <a:ext cx="7673896" cy="5847755"/>
+          </a:xfrm>
+          <a:prstGeom prst="rect">
+            <a:avLst/>
+          </a:prstGeom>
+          <a:noFill/>
+        </p:spPr>
+        <p:txBody>
+          <a:bodyPr wrap="none" rtlCol="0">
+            <a:spAutoFit/>
+          </a:bodyPr>
+          <a:lstStyle/>
+          <a:p>
+            <a:r>
+              <a:rPr lang="en-US" altLang="ko-KR" sz="1100" dirty="0" err="1">
+                <a:hlinkClick r:id="rId2"/>
+              </a:rPr>
+              <a:t>SlaveInfo</a:t>
+            </a:r>
+            <a:r>
+              <a:rPr lang="en-US" altLang="ko-KR" sz="1100" dirty="0">
+                <a:hlinkClick r:id="rId2"/>
+              </a:rPr>
+              <a:t> </a:t>
+            </a:r>
+            <a:r>
+              <a:rPr lang="ko-KR" altLang="en-US" sz="1100" dirty="0">
+                <a:hlinkClick r:id="rId2"/>
+              </a:rPr>
+              <a:t>관련 대기</a:t>
+            </a:r>
+            <a:r>
+              <a:rPr lang="en-US" altLang="ko-KR" sz="1100" dirty="0">
+                <a:hlinkClick r:id="rId2"/>
+              </a:rPr>
+              <a:t>.</a:t>
+            </a:r>
+            <a:r>
+              <a:rPr lang="ko-KR" altLang="en-US" sz="1100" dirty="0"/>
+              <a:t> </a:t>
+            </a:r>
+          </a:p>
+          <a:p>
+            <a:r>
+              <a:rPr lang="ko-KR" altLang="en-US" sz="1100" dirty="0" err="1"/>
+              <a:t>래핑할</a:t>
+            </a:r>
+            <a:r>
+              <a:rPr lang="ko-KR" altLang="en-US" sz="1100" dirty="0"/>
+              <a:t> 코드양이 많아져서 나중으로 </a:t>
+            </a:r>
+            <a:r>
+              <a:rPr lang="ko-KR" altLang="en-US" sz="1100" dirty="0" err="1"/>
+              <a:t>돌려야됨</a:t>
+            </a:r>
+            <a:r>
+              <a:rPr lang="en-US" altLang="ko-KR" sz="1100" dirty="0"/>
+              <a:t>. PDO </a:t>
+            </a:r>
+            <a:r>
+              <a:rPr lang="ko-KR" altLang="en-US" sz="1100" dirty="0"/>
+              <a:t>이후로</a:t>
+            </a:r>
+            <a:r>
+              <a:rPr lang="en-US" altLang="ko-KR" sz="1100" dirty="0"/>
+              <a:t>.</a:t>
+            </a:r>
+          </a:p>
+          <a:p>
+            <a:endParaRPr lang="en-US" altLang="ko-KR" sz="1100" dirty="0"/>
+          </a:p>
+          <a:p>
+            <a:r>
+              <a:rPr lang="ko-KR" altLang="en-US" sz="1100" dirty="0"/>
+              <a:t>이후 추가작업</a:t>
+            </a:r>
+            <a:r>
+              <a:rPr lang="en-US" altLang="ko-KR" sz="1100" dirty="0"/>
+              <a:t>.PDO</a:t>
+            </a:r>
+          </a:p>
+          <a:p>
+            <a:endParaRPr lang="en-US" altLang="ko-KR" sz="1100" dirty="0"/>
+          </a:p>
+          <a:p>
+            <a:r>
+              <a:rPr lang="ko-KR" altLang="en-US" sz="1100" dirty="0"/>
+              <a:t>기본 구현 아이디어</a:t>
+            </a:r>
+            <a:r>
+              <a:rPr lang="en-US" altLang="ko-KR" sz="1100" dirty="0"/>
+              <a:t>.</a:t>
+            </a:r>
+          </a:p>
+          <a:p>
+            <a:r>
+              <a:rPr lang="en-US" altLang="ko-KR" sz="1100" dirty="0" err="1"/>
+              <a:t>PDOLoop</a:t>
+            </a:r>
+            <a:r>
+              <a:rPr lang="ko-KR" altLang="en-US" sz="1100" dirty="0"/>
+              <a:t>에서 </a:t>
+            </a:r>
+            <a:r>
+              <a:rPr lang="en-US" altLang="ko-KR" sz="1100" dirty="0"/>
+              <a:t>Slave</a:t>
+            </a:r>
+            <a:r>
+              <a:rPr lang="ko-KR" altLang="en-US" sz="1100" dirty="0" err="1"/>
+              <a:t>갯수대로</a:t>
+            </a:r>
+            <a:r>
+              <a:rPr lang="ko-KR" altLang="en-US" sz="1100" dirty="0"/>
+              <a:t> </a:t>
+            </a:r>
+            <a:r>
+              <a:rPr lang="en-US" altLang="ko-KR" sz="1100" dirty="0" err="1"/>
+              <a:t>DataMap</a:t>
+            </a:r>
+            <a:r>
+              <a:rPr lang="ko-KR" altLang="en-US" sz="1100" dirty="0"/>
+              <a:t>에서 </a:t>
+            </a:r>
+            <a:r>
+              <a:rPr lang="en-US" altLang="ko-KR" sz="1100" dirty="0" err="1"/>
+              <a:t>PDOImage</a:t>
+            </a:r>
+            <a:r>
+              <a:rPr lang="ko-KR" altLang="en-US" sz="1100" dirty="0"/>
+              <a:t>를 가져와서 반영하는 방식으로 진행</a:t>
+            </a:r>
+            <a:r>
+              <a:rPr lang="en-US" altLang="ko-KR" sz="1100" dirty="0"/>
+              <a:t>.</a:t>
+            </a:r>
+          </a:p>
+          <a:p>
+            <a:r>
+              <a:rPr lang="ko-KR" altLang="en-US" sz="1100" dirty="0"/>
+              <a:t>해당 </a:t>
+            </a:r>
+            <a:r>
+              <a:rPr lang="en-US" altLang="ko-KR" sz="1100" dirty="0"/>
+              <a:t>Slave</a:t>
+            </a:r>
+            <a:r>
+              <a:rPr lang="ko-KR" altLang="en-US" sz="1100" dirty="0"/>
+              <a:t>가 어떤 프로파일을 사용하는지는 유저 정의로 처리</a:t>
+            </a:r>
+            <a:r>
+              <a:rPr lang="en-US" altLang="ko-KR" sz="1100" dirty="0"/>
+              <a:t>.</a:t>
+            </a:r>
+          </a:p>
+          <a:p>
+            <a:r>
+              <a:rPr lang="en-US" altLang="ko-KR" sz="1100" dirty="0"/>
+              <a:t>402</a:t>
+            </a:r>
+            <a:r>
+              <a:rPr lang="ko-KR" altLang="en-US" sz="1100" dirty="0"/>
+              <a:t>인 경우</a:t>
+            </a:r>
+            <a:r>
+              <a:rPr lang="en-US" altLang="ko-KR" sz="1100" dirty="0"/>
+              <a:t>, Slave</a:t>
+            </a:r>
+            <a:r>
+              <a:rPr lang="ko-KR" altLang="en-US" sz="1100" dirty="0"/>
+              <a:t>에서 </a:t>
+            </a:r>
+            <a:r>
+              <a:rPr lang="en-US" altLang="ko-KR" sz="1100" dirty="0" err="1"/>
+              <a:t>PDOMap</a:t>
+            </a:r>
+            <a:r>
+              <a:rPr lang="ko-KR" altLang="en-US" sz="1100" dirty="0"/>
+              <a:t>를 읽어서 </a:t>
+            </a:r>
+            <a:r>
+              <a:rPr lang="en-US" altLang="ko-KR" sz="1100" dirty="0" err="1"/>
+              <a:t>mapImage</a:t>
+            </a:r>
+            <a:r>
+              <a:rPr lang="ko-KR" altLang="en-US" sz="1100" dirty="0"/>
+              <a:t>생성하는 방식으로 진행</a:t>
+            </a:r>
+            <a:r>
+              <a:rPr lang="en-US" altLang="ko-KR" sz="1100" dirty="0"/>
+              <a:t>.</a:t>
+            </a:r>
+          </a:p>
+          <a:p>
+            <a:endParaRPr lang="en-US" altLang="ko-KR" sz="1100" dirty="0"/>
+          </a:p>
+          <a:p>
+            <a:r>
+              <a:rPr lang="ko-KR" altLang="en-US" sz="1100" dirty="0"/>
+              <a:t>하지만 기본값은</a:t>
+            </a:r>
+            <a:r>
+              <a:rPr lang="en-US" altLang="ko-KR" sz="1100" dirty="0"/>
+              <a:t>, </a:t>
+            </a:r>
+            <a:r>
+              <a:rPr lang="en-US" altLang="ko-KR" sz="1100" dirty="0" err="1"/>
+              <a:t>PDOMap</a:t>
+            </a:r>
+            <a:r>
+              <a:rPr lang="ko-KR" altLang="en-US" sz="1100" dirty="0"/>
+              <a:t>을 </a:t>
+            </a:r>
+            <a:r>
+              <a:rPr lang="ko-KR" altLang="en-US" sz="1100" dirty="0" err="1"/>
+              <a:t>읽었을때</a:t>
+            </a:r>
+            <a:r>
+              <a:rPr lang="en-US" altLang="ko-KR" sz="1100" dirty="0"/>
+              <a:t>, 0x6040, 0x6041</a:t>
+            </a:r>
+            <a:r>
+              <a:rPr lang="ko-KR" altLang="en-US" sz="1100" dirty="0"/>
+              <a:t>이 있으면 기본값 </a:t>
+            </a:r>
+            <a:r>
+              <a:rPr lang="en-US" altLang="ko-KR" sz="1100" dirty="0"/>
+              <a:t>402</a:t>
+            </a:r>
+            <a:r>
+              <a:rPr lang="ko-KR" altLang="en-US" sz="1100" dirty="0"/>
+              <a:t>로 간주가능</a:t>
+            </a:r>
+            <a:r>
+              <a:rPr lang="en-US" altLang="ko-KR" sz="1100" dirty="0"/>
+              <a:t>.</a:t>
+            </a:r>
+          </a:p>
+          <a:p>
+            <a:r>
+              <a:rPr lang="ko-KR" altLang="en-US" sz="1100" dirty="0"/>
+              <a:t>아니라면 </a:t>
+            </a:r>
+            <a:r>
+              <a:rPr lang="en-US" altLang="ko-KR" sz="1100" dirty="0"/>
+              <a:t>IO</a:t>
+            </a:r>
+            <a:r>
+              <a:rPr lang="ko-KR" altLang="en-US" sz="1100" dirty="0"/>
+              <a:t>계열로 처리</a:t>
+            </a:r>
+            <a:r>
+              <a:rPr lang="en-US" altLang="ko-KR" sz="1100" dirty="0"/>
+              <a:t>.</a:t>
+            </a:r>
+          </a:p>
+          <a:p>
+            <a:endParaRPr lang="en-US" altLang="ko-KR" sz="1100" dirty="0"/>
+          </a:p>
+          <a:p>
+            <a:r>
+              <a:rPr lang="en-US" altLang="ko-KR" sz="1100" dirty="0"/>
+              <a:t>UI</a:t>
+            </a:r>
+            <a:r>
+              <a:rPr lang="ko-KR" altLang="en-US" sz="1100" dirty="0"/>
+              <a:t>는 </a:t>
+            </a:r>
+            <a:r>
+              <a:rPr lang="en-US" altLang="ko-KR" sz="1100" dirty="0"/>
+              <a:t>SDO</a:t>
+            </a:r>
+            <a:r>
+              <a:rPr lang="ko-KR" altLang="en-US" sz="1100" dirty="0"/>
+              <a:t>옆에 </a:t>
+            </a:r>
+            <a:r>
+              <a:rPr lang="en-US" altLang="ko-KR" sz="1100" dirty="0"/>
+              <a:t>PDO </a:t>
+            </a:r>
+            <a:r>
+              <a:rPr lang="ko-KR" altLang="en-US" sz="1100" dirty="0"/>
+              <a:t>탭 생성해서 진행</a:t>
+            </a:r>
+            <a:r>
+              <a:rPr lang="en-US" altLang="ko-KR" sz="1100" dirty="0"/>
+              <a:t>.</a:t>
+            </a:r>
+          </a:p>
+          <a:p>
+            <a:endParaRPr lang="en-US" altLang="ko-KR" sz="1100" dirty="0"/>
+          </a:p>
+          <a:p>
+            <a:r>
+              <a:rPr lang="en-US" altLang="ko-KR" sz="1100" dirty="0"/>
+              <a:t>Profile</a:t>
+            </a:r>
+            <a:r>
+              <a:rPr lang="ko-KR" altLang="en-US" sz="1100" dirty="0"/>
+              <a:t>은 상위 </a:t>
+            </a:r>
+            <a:r>
+              <a:rPr lang="en-US" altLang="ko-KR" sz="1100" dirty="0" err="1"/>
+              <a:t>Combobox</a:t>
+            </a:r>
+            <a:r>
+              <a:rPr lang="en-US" altLang="ko-KR" sz="1100" dirty="0"/>
+              <a:t>, </a:t>
+            </a:r>
+            <a:r>
+              <a:rPr lang="ko-KR" altLang="en-US" sz="1100" dirty="0"/>
+              <a:t>모드는 </a:t>
+            </a:r>
+            <a:r>
+              <a:rPr lang="en-US" altLang="ko-KR" sz="1100" dirty="0"/>
+              <a:t>PP</a:t>
+            </a:r>
+            <a:r>
+              <a:rPr lang="ko-KR" altLang="en-US" sz="1100" dirty="0"/>
+              <a:t>모드</a:t>
+            </a:r>
+            <a:r>
+              <a:rPr lang="en-US" altLang="ko-KR" sz="1100" dirty="0"/>
+              <a:t>(</a:t>
+            </a:r>
+            <a:r>
+              <a:rPr lang="ko-KR" altLang="en-US" sz="1100" dirty="0"/>
+              <a:t>비활성화 </a:t>
+            </a:r>
+            <a:r>
+              <a:rPr lang="en-US" altLang="ko-KR" sz="1100" dirty="0" err="1"/>
+              <a:t>Combobox</a:t>
+            </a:r>
+            <a:r>
+              <a:rPr lang="en-US" altLang="ko-KR" sz="1100" dirty="0"/>
+              <a:t>)</a:t>
+            </a:r>
+            <a:r>
+              <a:rPr lang="ko-KR" altLang="en-US" sz="1100" dirty="0"/>
+              <a:t>처리</a:t>
+            </a:r>
+            <a:r>
+              <a:rPr lang="en-US" altLang="ko-KR" sz="1100" dirty="0"/>
+              <a:t>.</a:t>
+            </a:r>
+          </a:p>
+          <a:p>
+            <a:r>
+              <a:rPr lang="en-US" altLang="ko-KR" sz="1100" dirty="0"/>
+              <a:t>Servo</a:t>
+            </a:r>
+            <a:r>
+              <a:rPr lang="ko-KR" altLang="en-US" sz="1100" dirty="0"/>
+              <a:t>의 경우에 모터 기동 관련 화면</a:t>
+            </a:r>
+            <a:r>
+              <a:rPr lang="en-US" altLang="ko-KR" sz="1100" dirty="0"/>
+              <a:t>.</a:t>
+            </a:r>
+          </a:p>
+          <a:p>
+            <a:endParaRPr lang="en-US" altLang="ko-KR" sz="1100" dirty="0"/>
+          </a:p>
+          <a:p>
+            <a:r>
+              <a:rPr lang="en-US" altLang="ko-KR" sz="1100" dirty="0"/>
+              <a:t>Mapping </a:t>
+            </a:r>
+            <a:r>
+              <a:rPr lang="ko-KR" altLang="en-US" sz="1100" dirty="0"/>
+              <a:t>확인하고</a:t>
+            </a:r>
+            <a:r>
+              <a:rPr lang="en-US" altLang="ko-KR" sz="1100" dirty="0"/>
+              <a:t>, PP</a:t>
+            </a:r>
+            <a:r>
+              <a:rPr lang="ko-KR" altLang="en-US" sz="1100" dirty="0"/>
+              <a:t>를 위한 속도 모드가 있으면 해당 항목 </a:t>
+            </a:r>
+            <a:r>
+              <a:rPr lang="en-US" altLang="ko-KR" sz="1100" dirty="0"/>
+              <a:t>PDO</a:t>
+            </a:r>
+            <a:r>
+              <a:rPr lang="ko-KR" altLang="en-US" sz="1100" dirty="0"/>
+              <a:t>에 노출</a:t>
+            </a:r>
+            <a:r>
+              <a:rPr lang="en-US" altLang="ko-KR" sz="1100" dirty="0"/>
+              <a:t>.</a:t>
+            </a:r>
+          </a:p>
+          <a:p>
+            <a:endParaRPr lang="en-US" altLang="ko-KR" sz="1100" dirty="0"/>
+          </a:p>
+          <a:p>
+            <a:r>
+              <a:rPr lang="ko-KR" altLang="en-US" sz="1100" dirty="0"/>
+              <a:t>아니면 </a:t>
+            </a:r>
+            <a:r>
+              <a:rPr lang="en-US" altLang="ko-KR" sz="1100" dirty="0"/>
+              <a:t>SDO</a:t>
+            </a:r>
+            <a:r>
+              <a:rPr lang="ko-KR" altLang="en-US" sz="1100" dirty="0"/>
+              <a:t>형식으로 인지할 수 있게 해서 노출</a:t>
+            </a:r>
+            <a:r>
+              <a:rPr lang="en-US" altLang="ko-KR" sz="1100" dirty="0"/>
+              <a:t>.</a:t>
+            </a:r>
+          </a:p>
+          <a:p>
+            <a:endParaRPr lang="en-US" altLang="ko-KR" sz="1100" dirty="0"/>
+          </a:p>
+          <a:p>
+            <a:r>
+              <a:rPr lang="ko-KR" altLang="en-US" sz="1100" dirty="0"/>
+              <a:t>기타 항목은 </a:t>
+            </a:r>
+            <a:r>
+              <a:rPr lang="en-US" altLang="ko-KR" sz="1100" dirty="0"/>
+              <a:t>Bitmap</a:t>
+            </a:r>
+            <a:r>
+              <a:rPr lang="ko-KR" altLang="en-US" sz="1100" dirty="0"/>
+              <a:t>노출</a:t>
+            </a:r>
+            <a:r>
+              <a:rPr lang="en-US" altLang="ko-KR" sz="1100" dirty="0"/>
+              <a:t>.</a:t>
+            </a:r>
+          </a:p>
+          <a:p>
+            <a:endParaRPr lang="en-US" altLang="ko-KR" sz="1100" dirty="0"/>
+          </a:p>
+          <a:p>
+            <a:r>
+              <a:rPr lang="ko-KR" altLang="en-US" sz="1100" dirty="0"/>
+              <a:t>추가로 지원모드</a:t>
+            </a:r>
+            <a:r>
+              <a:rPr lang="en-US" altLang="ko-KR" sz="1100" dirty="0"/>
+              <a:t>, </a:t>
+            </a:r>
+            <a:r>
+              <a:rPr lang="ko-KR" altLang="en-US" sz="1100" dirty="0"/>
+              <a:t>현재 모드</a:t>
+            </a:r>
+            <a:r>
+              <a:rPr lang="en-US" altLang="ko-KR" sz="1100" dirty="0"/>
+              <a:t>, </a:t>
+            </a:r>
+            <a:r>
+              <a:rPr lang="ko-KR" altLang="en-US" sz="1100" dirty="0"/>
+              <a:t>지원 </a:t>
+            </a:r>
+            <a:r>
+              <a:rPr lang="en-US" altLang="ko-KR" sz="1100" dirty="0"/>
+              <a:t>Homing mode, </a:t>
+            </a:r>
+            <a:r>
+              <a:rPr lang="ko-KR" altLang="en-US" sz="1100" dirty="0"/>
+              <a:t>현재 </a:t>
+            </a:r>
+            <a:r>
+              <a:rPr lang="en-US" altLang="ko-KR" sz="1100" dirty="0"/>
+              <a:t>Homing Mode</a:t>
+            </a:r>
+            <a:r>
+              <a:rPr lang="ko-KR" altLang="en-US" sz="1100" dirty="0"/>
+              <a:t>도 </a:t>
+            </a:r>
+            <a:r>
+              <a:rPr lang="en-US" altLang="ko-KR" sz="1100" dirty="0"/>
+              <a:t>PDO</a:t>
+            </a:r>
+            <a:r>
+              <a:rPr lang="ko-KR" altLang="en-US" sz="1100" dirty="0"/>
+              <a:t>에 노출할 수 있도록 하면 좀 </a:t>
+            </a:r>
+            <a:r>
+              <a:rPr lang="ko-KR" altLang="en-US" sz="1100" dirty="0" err="1"/>
+              <a:t>그런가</a:t>
+            </a:r>
+            <a:r>
+              <a:rPr lang="en-US" altLang="ko-KR" sz="1100" dirty="0"/>
+              <a:t>….--;;</a:t>
+            </a:r>
+          </a:p>
+          <a:p>
+            <a:endParaRPr lang="en-US" altLang="ko-KR" sz="1100" dirty="0"/>
+          </a:p>
+          <a:p>
+            <a:r>
+              <a:rPr lang="en-US" altLang="ko-KR" sz="1100" dirty="0"/>
+              <a:t>PDO</a:t>
+            </a:r>
+            <a:r>
+              <a:rPr lang="ko-KR" altLang="en-US" sz="1100" dirty="0"/>
+              <a:t>에는 </a:t>
+            </a:r>
+            <a:r>
+              <a:rPr lang="en-US" altLang="ko-KR" sz="1100" dirty="0"/>
+              <a:t>PDO</a:t>
+            </a:r>
+            <a:r>
+              <a:rPr lang="ko-KR" altLang="en-US" sz="1100" dirty="0"/>
+              <a:t>관련만</a:t>
+            </a:r>
+            <a:r>
+              <a:rPr lang="en-US" altLang="ko-KR" sz="1100" dirty="0"/>
+              <a:t>,</a:t>
+            </a:r>
+          </a:p>
+          <a:p>
+            <a:r>
+              <a:rPr lang="ko-KR" altLang="en-US" sz="1100" dirty="0"/>
+              <a:t>동작은 새 탭으로 진행할거</a:t>
+            </a:r>
+            <a:r>
+              <a:rPr lang="en-US" altLang="ko-KR" sz="1100" dirty="0"/>
+              <a:t>.(Control </a:t>
+            </a:r>
+            <a:r>
+              <a:rPr lang="ko-KR" altLang="en-US" sz="1100" dirty="0"/>
+              <a:t>탭</a:t>
+            </a:r>
+            <a:r>
+              <a:rPr lang="en-US" altLang="ko-KR" sz="1100"/>
+              <a:t>)</a:t>
+            </a:r>
+            <a:endParaRPr lang="en-US" altLang="ko-KR" sz="1100" dirty="0"/>
+          </a:p>
+          <a:p>
+            <a:endParaRPr lang="en-US" altLang="ko-KR" sz="1100" dirty="0"/>
+          </a:p>
+          <a:p>
+            <a:r>
+              <a:rPr lang="en-US" altLang="ko-KR" sz="1100" dirty="0"/>
+              <a:t>IO</a:t>
+            </a:r>
+            <a:r>
+              <a:rPr lang="ko-KR" altLang="en-US" sz="1100" dirty="0"/>
+              <a:t>의 경우 </a:t>
+            </a:r>
+            <a:r>
+              <a:rPr lang="en-US" altLang="ko-KR" sz="1100" dirty="0" err="1"/>
+              <a:t>BitMap</a:t>
+            </a:r>
+            <a:r>
+              <a:rPr lang="en-US" altLang="ko-KR" sz="1100" dirty="0"/>
+              <a:t> </a:t>
+            </a:r>
+            <a:r>
+              <a:rPr lang="ko-KR" altLang="en-US" sz="1100" dirty="0"/>
+              <a:t>노출</a:t>
+            </a:r>
+            <a:r>
+              <a:rPr lang="en-US" altLang="ko-KR" sz="1100" dirty="0"/>
+              <a:t>.(In/Out)</a:t>
+            </a:r>
+          </a:p>
+          <a:p>
+            <a:endParaRPr lang="en-US" altLang="ko-KR" sz="1100" dirty="0"/>
+          </a:p>
+          <a:p>
+            <a:endParaRPr lang="en-US" altLang="ko-KR" sz="1100" dirty="0"/>
+          </a:p>
+          <a:p>
+            <a:endParaRPr lang="en-US" altLang="ko-KR" sz="1100" dirty="0"/>
+          </a:p>
+          <a:p>
+            <a:r>
+              <a:rPr lang="ko-KR" altLang="en-US" sz="1100" dirty="0"/>
+              <a:t>기타</a:t>
+            </a:r>
+            <a:r>
+              <a:rPr lang="en-US" altLang="ko-KR" sz="1100" dirty="0"/>
+              <a:t> - </a:t>
+            </a:r>
+            <a:r>
+              <a:rPr lang="ko-KR" altLang="en-US" sz="1100" dirty="0"/>
+              <a:t>로그 처리</a:t>
+            </a:r>
+            <a:r>
+              <a:rPr lang="en-US" altLang="ko-KR" sz="1100" dirty="0"/>
+              <a:t>.(</a:t>
+            </a:r>
+            <a:r>
+              <a:rPr lang="en-US" altLang="ko-KR" sz="1100" dirty="0" err="1"/>
+              <a:t>Serilog</a:t>
+            </a:r>
+            <a:r>
+              <a:rPr lang="en-US" altLang="ko-KR" sz="1100" dirty="0"/>
+              <a:t>) – Log</a:t>
+            </a:r>
+            <a:r>
+              <a:rPr lang="ko-KR" altLang="en-US" sz="1100" dirty="0"/>
+              <a:t>처리에서 </a:t>
+            </a:r>
+            <a:r>
+              <a:rPr lang="en-US" altLang="ko-KR" sz="1100" dirty="0"/>
+              <a:t>UI</a:t>
+            </a:r>
+            <a:r>
+              <a:rPr lang="ko-KR" altLang="en-US" sz="1100" dirty="0"/>
+              <a:t>표기까지 같이 </a:t>
+            </a:r>
+            <a:r>
+              <a:rPr lang="ko-KR" altLang="en-US" sz="1100" dirty="0" err="1"/>
+              <a:t>넘어가야됨</a:t>
+            </a:r>
+            <a:r>
+              <a:rPr lang="en-US" altLang="ko-KR" sz="1100" dirty="0"/>
+              <a:t>.</a:t>
+            </a:r>
+          </a:p>
+        </p:txBody>
+      </p:sp>
+    </p:spTree>
+    <p:extLst>
+      <p:ext uri="{BB962C8B-B14F-4D97-AF65-F5344CB8AC3E}">
+        <p14:creationId xmlns:p14="http://schemas.microsoft.com/office/powerpoint/2010/main" val="1239538318"/>
+      </p:ext>
+    </p:extLst>
+  </p:cSld>
+  <p:clrMapOvr>
+    <a:masterClrMapping/>
+  </p:clrMapOvr>
+</p:sld>
+</file>
+
 <file path=ppt/theme/theme1.xml><?xml version="1.0" encoding="utf-8"?>
 <a:theme xmlns:a="http://schemas.openxmlformats.org/drawingml/2006/main" name="Office 테마">
   <a:themeElements>

--- a/작업추가내용.pptx
+++ b/작업추가내용.pptx
@@ -7,6 +7,8 @@
   <p:sldIdLst>
     <p:sldId id="256" r:id="rId2"/>
     <p:sldId id="257" r:id="rId3"/>
+    <p:sldId id="258" r:id="rId4"/>
+    <p:sldId id="259" r:id="rId5"/>
   </p:sldIdLst>
   <p:sldSz cx="12192000" cy="6858000"/>
   <p:notesSz cx="6858000" cy="9144000"/>
@@ -260,7 +262,7 @@
           <a:p>
             <a:fld id="{9BE1C720-ACC4-4A8E-B33A-18A3D3E259C1}" type="datetimeFigureOut">
               <a:rPr lang="ko-KR" altLang="en-US" smtClean="0"/>
-              <a:t>2026-02-08</a:t>
+              <a:t>2026-02-13</a:t>
             </a:fld>
             <a:endParaRPr lang="ko-KR" altLang="en-US"/>
           </a:p>
@@ -458,7 +460,7 @@
           <a:p>
             <a:fld id="{9BE1C720-ACC4-4A8E-B33A-18A3D3E259C1}" type="datetimeFigureOut">
               <a:rPr lang="ko-KR" altLang="en-US" smtClean="0"/>
-              <a:t>2026-02-08</a:t>
+              <a:t>2026-02-13</a:t>
             </a:fld>
             <a:endParaRPr lang="ko-KR" altLang="en-US"/>
           </a:p>
@@ -666,7 +668,7 @@
           <a:p>
             <a:fld id="{9BE1C720-ACC4-4A8E-B33A-18A3D3E259C1}" type="datetimeFigureOut">
               <a:rPr lang="ko-KR" altLang="en-US" smtClean="0"/>
-              <a:t>2026-02-08</a:t>
+              <a:t>2026-02-13</a:t>
             </a:fld>
             <a:endParaRPr lang="ko-KR" altLang="en-US"/>
           </a:p>
@@ -864,7 +866,7 @@
           <a:p>
             <a:fld id="{9BE1C720-ACC4-4A8E-B33A-18A3D3E259C1}" type="datetimeFigureOut">
               <a:rPr lang="ko-KR" altLang="en-US" smtClean="0"/>
-              <a:t>2026-02-08</a:t>
+              <a:t>2026-02-13</a:t>
             </a:fld>
             <a:endParaRPr lang="ko-KR" altLang="en-US"/>
           </a:p>
@@ -1139,7 +1141,7 @@
           <a:p>
             <a:fld id="{9BE1C720-ACC4-4A8E-B33A-18A3D3E259C1}" type="datetimeFigureOut">
               <a:rPr lang="ko-KR" altLang="en-US" smtClean="0"/>
-              <a:t>2026-02-08</a:t>
+              <a:t>2026-02-13</a:t>
             </a:fld>
             <a:endParaRPr lang="ko-KR" altLang="en-US"/>
           </a:p>
@@ -1404,7 +1406,7 @@
           <a:p>
             <a:fld id="{9BE1C720-ACC4-4A8E-B33A-18A3D3E259C1}" type="datetimeFigureOut">
               <a:rPr lang="ko-KR" altLang="en-US" smtClean="0"/>
-              <a:t>2026-02-08</a:t>
+              <a:t>2026-02-13</a:t>
             </a:fld>
             <a:endParaRPr lang="ko-KR" altLang="en-US"/>
           </a:p>
@@ -1816,7 +1818,7 @@
           <a:p>
             <a:fld id="{9BE1C720-ACC4-4A8E-B33A-18A3D3E259C1}" type="datetimeFigureOut">
               <a:rPr lang="ko-KR" altLang="en-US" smtClean="0"/>
-              <a:t>2026-02-08</a:t>
+              <a:t>2026-02-13</a:t>
             </a:fld>
             <a:endParaRPr lang="ko-KR" altLang="en-US"/>
           </a:p>
@@ -1957,7 +1959,7 @@
           <a:p>
             <a:fld id="{9BE1C720-ACC4-4A8E-B33A-18A3D3E259C1}" type="datetimeFigureOut">
               <a:rPr lang="ko-KR" altLang="en-US" smtClean="0"/>
-              <a:t>2026-02-08</a:t>
+              <a:t>2026-02-13</a:t>
             </a:fld>
             <a:endParaRPr lang="ko-KR" altLang="en-US"/>
           </a:p>
@@ -2070,7 +2072,7 @@
           <a:p>
             <a:fld id="{9BE1C720-ACC4-4A8E-B33A-18A3D3E259C1}" type="datetimeFigureOut">
               <a:rPr lang="ko-KR" altLang="en-US" smtClean="0"/>
-              <a:t>2026-02-08</a:t>
+              <a:t>2026-02-13</a:t>
             </a:fld>
             <a:endParaRPr lang="ko-KR" altLang="en-US"/>
           </a:p>
@@ -2381,7 +2383,7 @@
           <a:p>
             <a:fld id="{9BE1C720-ACC4-4A8E-B33A-18A3D3E259C1}" type="datetimeFigureOut">
               <a:rPr lang="ko-KR" altLang="en-US" smtClean="0"/>
-              <a:t>2026-02-08</a:t>
+              <a:t>2026-02-13</a:t>
             </a:fld>
             <a:endParaRPr lang="ko-KR" altLang="en-US"/>
           </a:p>
@@ -2669,7 +2671,7 @@
           <a:p>
             <a:fld id="{9BE1C720-ACC4-4A8E-B33A-18A3D3E259C1}" type="datetimeFigureOut">
               <a:rPr lang="ko-KR" altLang="en-US" smtClean="0"/>
-              <a:t>2026-02-08</a:t>
+              <a:t>2026-02-13</a:t>
             </a:fld>
             <a:endParaRPr lang="ko-KR" altLang="en-US"/>
           </a:p>
@@ -2910,7 +2912,7 @@
           <a:p>
             <a:fld id="{9BE1C720-ACC4-4A8E-B33A-18A3D3E259C1}" type="datetimeFigureOut">
               <a:rPr lang="ko-KR" altLang="en-US" smtClean="0"/>
-              <a:t>2026-02-08</a:t>
+              <a:t>2026-02-13</a:t>
             </a:fld>
             <a:endParaRPr lang="ko-KR" altLang="en-US"/>
           </a:p>
@@ -4523,6 +4525,512 @@
 </p:sld>
 </file>
 
+<file path=ppt/slides/slide3.xml><?xml version="1.0" encoding="utf-8"?>
+<p:sld xmlns:a="http://schemas.openxmlformats.org/drawingml/2006/main" xmlns:r="http://schemas.openxmlformats.org/officeDocument/2006/relationships" xmlns:p="http://schemas.openxmlformats.org/presentationml/2006/main">
+  <p:cSld>
+    <p:spTree>
+      <p:nvGrpSpPr>
+        <p:cNvPr id="1" name=""/>
+        <p:cNvGrpSpPr/>
+        <p:nvPr/>
+      </p:nvGrpSpPr>
+      <p:grpSpPr>
+        <a:xfrm>
+          <a:off x="0" y="0"/>
+          <a:ext cx="0" cy="0"/>
+          <a:chOff x="0" y="0"/>
+          <a:chExt cx="0" cy="0"/>
+        </a:xfrm>
+      </p:grpSpPr>
+      <p:sp>
+        <p:nvSpPr>
+          <p:cNvPr id="4" name="TextBox 3">
+            <a:extLst>
+              <a:ext uri="{FF2B5EF4-FFF2-40B4-BE49-F238E27FC236}">
+                <a16:creationId xmlns:a16="http://schemas.microsoft.com/office/drawing/2014/main" id="{7147CF29-A337-B139-BE5D-50650A79DB4A}"/>
+              </a:ext>
+            </a:extLst>
+          </p:cNvPr>
+          <p:cNvSpPr txBox="1"/>
+          <p:nvPr/>
+        </p:nvSpPr>
+        <p:spPr>
+          <a:xfrm>
+            <a:off x="92364" y="102064"/>
+            <a:ext cx="11536218" cy="7017306"/>
+          </a:xfrm>
+          <a:prstGeom prst="rect">
+            <a:avLst/>
+          </a:prstGeom>
+          <a:noFill/>
+        </p:spPr>
+        <p:txBody>
+          <a:bodyPr wrap="square" rtlCol="0">
+            <a:spAutoFit/>
+          </a:bodyPr>
+          <a:lstStyle/>
+          <a:p>
+            <a:r>
+              <a:rPr lang="en-US" altLang="ko-KR" dirty="0"/>
+              <a:t>PDO </a:t>
+            </a:r>
+            <a:r>
+              <a:rPr lang="ko-KR" altLang="en-US" dirty="0"/>
+              <a:t>작업</a:t>
+            </a:r>
+            <a:r>
+              <a:rPr lang="en-US" altLang="ko-KR" dirty="0"/>
+              <a:t>./ ENI</a:t>
+            </a:r>
+            <a:r>
+              <a:rPr lang="ko-KR" altLang="en-US" dirty="0"/>
+              <a:t>작업</a:t>
+            </a:r>
+            <a:r>
+              <a:rPr lang="en-US" altLang="ko-KR" dirty="0"/>
+              <a:t>.</a:t>
+            </a:r>
+          </a:p>
+          <a:p>
+            <a:endParaRPr lang="en-US" altLang="ko-KR" dirty="0"/>
+          </a:p>
+          <a:p>
+            <a:r>
+              <a:rPr lang="en-US" altLang="ko-KR" dirty="0"/>
+              <a:t>ENI</a:t>
+            </a:r>
+            <a:r>
+              <a:rPr lang="ko-KR" altLang="en-US" dirty="0"/>
+              <a:t>는 </a:t>
+            </a:r>
+            <a:r>
+              <a:rPr lang="en-US" altLang="ko-KR" dirty="0" err="1"/>
+              <a:t>Twincat</a:t>
+            </a:r>
+            <a:r>
+              <a:rPr lang="ko-KR" altLang="en-US" dirty="0" err="1"/>
+              <a:t>쓰지말고</a:t>
+            </a:r>
+            <a:r>
+              <a:rPr lang="en-US" altLang="ko-KR" dirty="0"/>
+              <a:t>, </a:t>
+            </a:r>
+            <a:r>
+              <a:rPr lang="ko-KR" altLang="en-US" dirty="0"/>
+              <a:t>자체 </a:t>
+            </a:r>
+            <a:r>
+              <a:rPr lang="en-US" altLang="ko-KR" dirty="0"/>
+              <a:t>ENI</a:t>
+            </a:r>
+            <a:r>
+              <a:rPr lang="ko-KR" altLang="en-US" dirty="0"/>
+              <a:t>를 사용함</a:t>
+            </a:r>
+            <a:r>
+              <a:rPr lang="en-US" altLang="ko-KR" dirty="0"/>
+              <a:t>.</a:t>
+            </a:r>
+          </a:p>
+          <a:p>
+            <a:endParaRPr lang="en-US" altLang="ko-KR" dirty="0"/>
+          </a:p>
+          <a:p>
+            <a:endParaRPr lang="en-US" altLang="ko-KR" dirty="0"/>
+          </a:p>
+          <a:p>
+            <a:r>
+              <a:rPr lang="en-US" altLang="ko-KR" dirty="0"/>
+              <a:t>Json </a:t>
+            </a:r>
+            <a:r>
+              <a:rPr lang="ko-KR" altLang="en-US" dirty="0"/>
+              <a:t>타입</a:t>
+            </a:r>
+            <a:r>
+              <a:rPr lang="en-US" altLang="ko-KR" dirty="0"/>
+              <a:t>, </a:t>
+            </a:r>
+            <a:r>
+              <a:rPr lang="ko-KR" altLang="en-US" dirty="0" err="1"/>
+              <a:t>상태머신에서</a:t>
+            </a:r>
+            <a:r>
+              <a:rPr lang="ko-KR" altLang="en-US" dirty="0"/>
+              <a:t> 가져다 사용할거</a:t>
+            </a:r>
+            <a:r>
+              <a:rPr lang="en-US" altLang="ko-KR" dirty="0"/>
+              <a:t>.</a:t>
+            </a:r>
+          </a:p>
+          <a:p>
+            <a:endParaRPr lang="en-US" altLang="ko-KR" dirty="0"/>
+          </a:p>
+          <a:p>
+            <a:r>
+              <a:rPr lang="ko-KR" altLang="en-US" dirty="0" err="1"/>
+              <a:t>상태머신</a:t>
+            </a:r>
+            <a:r>
+              <a:rPr lang="en-US" altLang="ko-KR" dirty="0"/>
+              <a:t>.</a:t>
+            </a:r>
+          </a:p>
+          <a:p>
+            <a:r>
+              <a:rPr lang="en-US" altLang="ko-KR" dirty="0"/>
+              <a:t>Init -&gt; </a:t>
+            </a:r>
+            <a:r>
+              <a:rPr lang="en-US" altLang="ko-KR" dirty="0" err="1"/>
+              <a:t>PreOP</a:t>
+            </a:r>
+            <a:r>
+              <a:rPr lang="en-US" altLang="ko-KR" dirty="0"/>
+              <a:t> -&gt; </a:t>
+            </a:r>
+            <a:r>
+              <a:rPr lang="en-US" altLang="ko-KR" dirty="0" err="1"/>
+              <a:t>SafeOP</a:t>
+            </a:r>
+            <a:r>
+              <a:rPr lang="en-US" altLang="ko-KR" dirty="0"/>
+              <a:t> -&gt; OP </a:t>
+            </a:r>
+            <a:r>
+              <a:rPr lang="ko-KR" altLang="en-US" dirty="0"/>
+              <a:t>상태 천이</a:t>
+            </a:r>
+            <a:r>
+              <a:rPr lang="en-US" altLang="ko-KR" dirty="0"/>
+              <a:t>.</a:t>
+            </a:r>
+          </a:p>
+          <a:p>
+            <a:endParaRPr lang="en-US" altLang="ko-KR" dirty="0"/>
+          </a:p>
+          <a:p>
+            <a:r>
+              <a:rPr lang="ko-KR" altLang="en-US" dirty="0"/>
+              <a:t>따라서 </a:t>
+            </a:r>
+            <a:r>
+              <a:rPr lang="ko-KR" altLang="en-US" dirty="0" err="1"/>
+              <a:t>상태머신도</a:t>
+            </a:r>
+            <a:r>
+              <a:rPr lang="ko-KR" altLang="en-US" dirty="0"/>
+              <a:t> </a:t>
+            </a:r>
+            <a:r>
+              <a:rPr lang="en-US" altLang="ko-KR" dirty="0"/>
+              <a:t>Init, </a:t>
+            </a:r>
+            <a:r>
+              <a:rPr lang="en-US" altLang="ko-KR" dirty="0" err="1"/>
+              <a:t>PreOP</a:t>
+            </a:r>
+            <a:r>
+              <a:rPr lang="en-US" altLang="ko-KR" dirty="0"/>
+              <a:t>, </a:t>
+            </a:r>
+            <a:r>
+              <a:rPr lang="en-US" altLang="ko-KR" dirty="0" err="1"/>
+              <a:t>SafeOP</a:t>
+            </a:r>
+            <a:r>
+              <a:rPr lang="en-US" altLang="ko-KR" dirty="0"/>
+              <a:t> -&gt; OP </a:t>
+            </a:r>
+            <a:r>
+              <a:rPr lang="ko-KR" altLang="en-US" dirty="0"/>
+              <a:t>상태천이 필요</a:t>
+            </a:r>
+            <a:r>
+              <a:rPr lang="en-US" altLang="ko-KR" dirty="0"/>
+              <a:t>.</a:t>
+            </a:r>
+          </a:p>
+          <a:p>
+            <a:endParaRPr lang="en-US" altLang="ko-KR" dirty="0"/>
+          </a:p>
+          <a:p>
+            <a:r>
+              <a:rPr lang="en-US" altLang="ko-KR" dirty="0" err="1"/>
+              <a:t>PreOP</a:t>
+            </a:r>
+            <a:r>
+              <a:rPr lang="ko-KR" altLang="en-US" dirty="0"/>
+              <a:t>에서 </a:t>
+            </a:r>
+            <a:r>
+              <a:rPr lang="en-US" altLang="ko-KR" dirty="0"/>
+              <a:t>Mapping, </a:t>
+            </a:r>
+          </a:p>
+          <a:p>
+            <a:endParaRPr lang="en-US" altLang="ko-KR" dirty="0"/>
+          </a:p>
+          <a:p>
+            <a:r>
+              <a:rPr lang="en-US" altLang="ko-KR" dirty="0" err="1"/>
+              <a:t>SafeOP</a:t>
+            </a:r>
+            <a:r>
+              <a:rPr lang="ko-KR" altLang="en-US" dirty="0"/>
+              <a:t>에서 </a:t>
+            </a:r>
+            <a:r>
+              <a:rPr lang="en-US" altLang="ko-KR" dirty="0"/>
+              <a:t>402</a:t>
+            </a:r>
+            <a:r>
+              <a:rPr lang="ko-KR" altLang="en-US" dirty="0"/>
+              <a:t>판별 및 </a:t>
+            </a:r>
+            <a:r>
+              <a:rPr lang="en-US" altLang="ko-KR" dirty="0"/>
+              <a:t>PDO </a:t>
+            </a:r>
+            <a:r>
+              <a:rPr lang="ko-KR" altLang="en-US" dirty="0"/>
+              <a:t>접근용 </a:t>
+            </a:r>
+            <a:r>
+              <a:rPr lang="ko-KR" altLang="en-US" dirty="0" err="1"/>
+              <a:t>매핑주소테이블</a:t>
+            </a:r>
+            <a:r>
+              <a:rPr lang="ko-KR" altLang="en-US" dirty="0"/>
+              <a:t> 작성</a:t>
+            </a:r>
+            <a:r>
+              <a:rPr lang="en-US" altLang="ko-KR" dirty="0"/>
+              <a:t>.</a:t>
+            </a:r>
+          </a:p>
+          <a:p>
+            <a:endParaRPr lang="en-US" altLang="ko-KR" dirty="0"/>
+          </a:p>
+          <a:p>
+            <a:r>
+              <a:rPr lang="ko-KR" altLang="en-US" dirty="0"/>
+              <a:t>개별 드라이브별로 </a:t>
+            </a:r>
+            <a:r>
+              <a:rPr lang="ko-KR" altLang="en-US" dirty="0" err="1"/>
+              <a:t>작성되야함</a:t>
+            </a:r>
+            <a:r>
+              <a:rPr lang="en-US" altLang="ko-KR" dirty="0"/>
+              <a:t>.</a:t>
+            </a:r>
+          </a:p>
+          <a:p>
+            <a:endParaRPr lang="en-US" altLang="ko-KR" dirty="0"/>
+          </a:p>
+          <a:p>
+            <a:endParaRPr lang="en-US" altLang="ko-KR" dirty="0"/>
+          </a:p>
+          <a:p>
+            <a:r>
+              <a:rPr lang="en-US" altLang="ko-KR" dirty="0"/>
+              <a:t>PDO</a:t>
+            </a:r>
+            <a:r>
+              <a:rPr lang="ko-KR" altLang="en-US" dirty="0"/>
+              <a:t>루프는 별개</a:t>
+            </a:r>
+            <a:r>
+              <a:rPr lang="en-US" altLang="ko-KR" dirty="0"/>
+              <a:t>, </a:t>
+            </a:r>
+            <a:r>
+              <a:rPr lang="ko-KR" altLang="en-US" dirty="0"/>
+              <a:t>실행은 </a:t>
+            </a:r>
+            <a:r>
+              <a:rPr lang="en-US" altLang="ko-KR" dirty="0"/>
+              <a:t>Master</a:t>
+            </a:r>
+            <a:r>
+              <a:rPr lang="ko-KR" altLang="en-US" dirty="0"/>
+              <a:t>클래스 부에서 실행</a:t>
+            </a:r>
+            <a:r>
+              <a:rPr lang="en-US" altLang="ko-KR" dirty="0"/>
+              <a:t>.</a:t>
+            </a:r>
+          </a:p>
+          <a:p>
+            <a:endParaRPr lang="en-US" altLang="ko-KR" dirty="0"/>
+          </a:p>
+          <a:p>
+            <a:endParaRPr lang="en-US" altLang="ko-KR" dirty="0"/>
+          </a:p>
+          <a:p>
+            <a:r>
+              <a:rPr lang="en-US" altLang="ko-KR" dirty="0"/>
+              <a:t>402 Drive </a:t>
+            </a:r>
+            <a:r>
+              <a:rPr lang="ko-KR" altLang="en-US" dirty="0" err="1"/>
+              <a:t>상태머신은</a:t>
+            </a:r>
+            <a:r>
+              <a:rPr lang="en-US" altLang="ko-KR" dirty="0"/>
+              <a:t>? </a:t>
+            </a:r>
+            <a:r>
+              <a:rPr lang="en-US" altLang="ko-KR" dirty="0">
+                <a:sym typeface="Wingdings" panose="05000000000000000000" pitchFamily="2" charset="2"/>
+              </a:rPr>
+              <a:t> </a:t>
+            </a:r>
+            <a:r>
+              <a:rPr lang="ko-KR" altLang="en-US" dirty="0">
+                <a:sym typeface="Wingdings" panose="05000000000000000000" pitchFamily="2" charset="2"/>
+              </a:rPr>
+              <a:t>일단 보류</a:t>
+            </a:r>
+            <a:r>
+              <a:rPr lang="en-US" altLang="ko-KR" dirty="0">
+                <a:sym typeface="Wingdings" panose="05000000000000000000" pitchFamily="2" charset="2"/>
+              </a:rPr>
+              <a:t>.</a:t>
+            </a:r>
+          </a:p>
+          <a:p>
+            <a:endParaRPr lang="en-US" altLang="ko-KR" dirty="0">
+              <a:sym typeface="Wingdings" panose="05000000000000000000" pitchFamily="2" charset="2"/>
+            </a:endParaRPr>
+          </a:p>
+          <a:p>
+            <a:endParaRPr lang="ko-KR" altLang="en-US" dirty="0"/>
+          </a:p>
+        </p:txBody>
+      </p:sp>
+    </p:spTree>
+    <p:extLst>
+      <p:ext uri="{BB962C8B-B14F-4D97-AF65-F5344CB8AC3E}">
+        <p14:creationId xmlns:p14="http://schemas.microsoft.com/office/powerpoint/2010/main" val="403951325"/>
+      </p:ext>
+    </p:extLst>
+  </p:cSld>
+  <p:clrMapOvr>
+    <a:masterClrMapping/>
+  </p:clrMapOvr>
+</p:sld>
+</file>
+
+<file path=ppt/slides/slide4.xml><?xml version="1.0" encoding="utf-8"?>
+<p:sld xmlns:a="http://schemas.openxmlformats.org/drawingml/2006/main" xmlns:r="http://schemas.openxmlformats.org/officeDocument/2006/relationships" xmlns:p="http://schemas.openxmlformats.org/presentationml/2006/main">
+  <p:cSld>
+    <p:spTree>
+      <p:nvGrpSpPr>
+        <p:cNvPr id="1" name=""/>
+        <p:cNvGrpSpPr/>
+        <p:nvPr/>
+      </p:nvGrpSpPr>
+      <p:grpSpPr>
+        <a:xfrm>
+          <a:off x="0" y="0"/>
+          <a:ext cx="0" cy="0"/>
+          <a:chOff x="0" y="0"/>
+          <a:chExt cx="0" cy="0"/>
+        </a:xfrm>
+      </p:grpSpPr>
+      <p:sp>
+        <p:nvSpPr>
+          <p:cNvPr id="4" name="TextBox 3">
+            <a:extLst>
+              <a:ext uri="{FF2B5EF4-FFF2-40B4-BE49-F238E27FC236}">
+                <a16:creationId xmlns:a16="http://schemas.microsoft.com/office/drawing/2014/main" id="{0684FC8B-51CA-3099-FDB2-D3D24AB9D069}"/>
+              </a:ext>
+            </a:extLst>
+          </p:cNvPr>
+          <p:cNvSpPr txBox="1"/>
+          <p:nvPr/>
+        </p:nvSpPr>
+        <p:spPr>
+          <a:xfrm>
+            <a:off x="517236" y="147782"/>
+            <a:ext cx="11582400" cy="923330"/>
+          </a:xfrm>
+          <a:prstGeom prst="rect">
+            <a:avLst/>
+          </a:prstGeom>
+          <a:noFill/>
+        </p:spPr>
+        <p:txBody>
+          <a:bodyPr wrap="square" rtlCol="0">
+            <a:spAutoFit/>
+          </a:bodyPr>
+          <a:lstStyle/>
+          <a:p>
+            <a:r>
+              <a:rPr lang="ko-KR" altLang="en-US" dirty="0"/>
+              <a:t>버그</a:t>
+            </a:r>
+            <a:endParaRPr lang="en-US" altLang="ko-KR" dirty="0"/>
+          </a:p>
+          <a:p>
+            <a:endParaRPr lang="en-US" altLang="ko-KR" dirty="0"/>
+          </a:p>
+          <a:p>
+            <a:r>
+              <a:rPr lang="ko-KR" altLang="en-US" dirty="0" err="1"/>
+              <a:t>이지서보에서</a:t>
+            </a:r>
+            <a:r>
+              <a:rPr lang="ko-KR" altLang="en-US" dirty="0"/>
+              <a:t> </a:t>
+            </a:r>
+            <a:r>
+              <a:rPr lang="en-US" altLang="ko-KR" dirty="0"/>
+              <a:t>DT1010 </a:t>
+            </a:r>
+            <a:r>
+              <a:rPr lang="ko-KR" altLang="en-US" dirty="0"/>
+              <a:t>관련 </a:t>
+            </a:r>
+            <a:r>
+              <a:rPr lang="ko-KR" altLang="en-US" dirty="0" err="1"/>
+              <a:t>서브인덱스를</a:t>
+            </a:r>
+            <a:r>
+              <a:rPr lang="ko-KR" altLang="en-US" dirty="0"/>
+              <a:t> </a:t>
+            </a:r>
+            <a:r>
+              <a:rPr lang="en-US" altLang="ko-KR" dirty="0"/>
+              <a:t>0</a:t>
+            </a:r>
+            <a:r>
+              <a:rPr lang="ko-KR" altLang="en-US" dirty="0"/>
+              <a:t>으로 판단하는 문제 있음</a:t>
+            </a:r>
+            <a:r>
+              <a:rPr lang="en-US" altLang="ko-KR"/>
+              <a:t>.</a:t>
+            </a:r>
+          </a:p>
+        </p:txBody>
+      </p:sp>
+    </p:spTree>
+    <p:extLst>
+      <p:ext uri="{BB962C8B-B14F-4D97-AF65-F5344CB8AC3E}">
+        <p14:creationId xmlns:p14="http://schemas.microsoft.com/office/powerpoint/2010/main" val="1841981530"/>
+      </p:ext>
+    </p:extLst>
+  </p:cSld>
+  <p:clrMapOvr>
+    <a:masterClrMapping/>
+  </p:clrMapOvr>
+</p:sld>
+</file>
+
 <file path=ppt/theme/theme1.xml><?xml version="1.0" encoding="utf-8"?>
 <a:theme xmlns:a="http://schemas.openxmlformats.org/drawingml/2006/main" name="Office 테마">
   <a:themeElements>
